--- a/course/modules/M01/L002/M01-L002-deck.pptx
+++ b/course/modules/M01/L002/M01-L002-deck.pptx
@@ -5180,7 +5180,7 @@
         <p:spPr>
           <a:xfrm>
             <a:off x="731520" y="4434840"/>
-            <a:ext cx="5029200" cy="1636776"/>
+            <a:ext cx="10058400" cy="1636776"/>
           </a:xfrm>
           <a:prstGeom prst="roundRect">
             <a:avLst>
@@ -5227,7 +5227,7 @@
         <p:spPr>
           <a:xfrm>
             <a:off x="932688" y="4581144"/>
-            <a:ext cx="4663440" cy="228600"/>
+            <a:ext cx="9692640" cy="228600"/>
           </a:xfrm>
           <a:prstGeom prst="rect">
             <a:avLst/>
@@ -5307,7 +5307,7 @@
         <p:spPr>
           <a:xfrm>
             <a:off x="1078992" y="4873752"/>
-            <a:ext cx="4526280" cy="274320"/>
+            <a:ext cx="9555480" cy="274320"/>
           </a:xfrm>
           <a:prstGeom prst="rect">
             <a:avLst/>
@@ -5420,7 +5420,7 @@
         <p:spPr>
           <a:xfrm>
             <a:off x="1078992" y="5184648"/>
-            <a:ext cx="4526280" cy="274320"/>
+            <a:ext cx="9555480" cy="274320"/>
           </a:xfrm>
           <a:prstGeom prst="rect">
             <a:avLst/>
@@ -5599,7 +5599,7 @@
         <p:spPr>
           <a:xfrm>
             <a:off x="1078992" y="5495544"/>
-            <a:ext cx="4526280" cy="274320"/>
+            <a:ext cx="9555480" cy="274320"/>
           </a:xfrm>
           <a:prstGeom prst="rect">
             <a:avLst/>
@@ -6588,7 +6588,7 @@
         <p:spPr>
           <a:xfrm>
             <a:off x="731520" y="4434840"/>
-            <a:ext cx="5029200" cy="1636776"/>
+            <a:ext cx="10058400" cy="1636776"/>
           </a:xfrm>
           <a:prstGeom prst="roundRect">
             <a:avLst>
@@ -6635,7 +6635,7 @@
         <p:spPr>
           <a:xfrm>
             <a:off x="932688" y="4581144"/>
-            <a:ext cx="4663440" cy="228600"/>
+            <a:ext cx="9692640" cy="228600"/>
           </a:xfrm>
           <a:prstGeom prst="rect">
             <a:avLst/>
@@ -6715,7 +6715,7 @@
         <p:spPr>
           <a:xfrm>
             <a:off x="1078992" y="4873752"/>
-            <a:ext cx="4526280" cy="274320"/>
+            <a:ext cx="9555480" cy="274320"/>
           </a:xfrm>
           <a:prstGeom prst="rect">
             <a:avLst/>
@@ -6916,7 +6916,7 @@
         <p:spPr>
           <a:xfrm>
             <a:off x="1078992" y="5184648"/>
-            <a:ext cx="4526280" cy="274320"/>
+            <a:ext cx="9555480" cy="274320"/>
           </a:xfrm>
           <a:prstGeom prst="rect">
             <a:avLst/>
@@ -7128,7 +7128,7 @@
         <p:spPr>
           <a:xfrm>
             <a:off x="1078992" y="5495544"/>
-            <a:ext cx="4526280" cy="274320"/>
+            <a:ext cx="9555480" cy="274320"/>
           </a:xfrm>
           <a:prstGeom prst="rect">
             <a:avLst/>
@@ -7909,7 +7909,7 @@
         <p:spPr>
           <a:xfrm>
             <a:off x="731520" y="4434840"/>
-            <a:ext cx="5029200" cy="1636776"/>
+            <a:ext cx="10058400" cy="1636776"/>
           </a:xfrm>
           <a:prstGeom prst="roundRect">
             <a:avLst>
@@ -7956,7 +7956,7 @@
         <p:spPr>
           <a:xfrm>
             <a:off x="932688" y="4581144"/>
-            <a:ext cx="4663440" cy="228600"/>
+            <a:ext cx="9692640" cy="228600"/>
           </a:xfrm>
           <a:prstGeom prst="rect">
             <a:avLst/>
@@ -8036,7 +8036,7 @@
         <p:spPr>
           <a:xfrm>
             <a:off x="1078992" y="4873752"/>
-            <a:ext cx="4526280" cy="274320"/>
+            <a:ext cx="9555480" cy="274320"/>
           </a:xfrm>
           <a:prstGeom prst="rect">
             <a:avLst/>
@@ -8270,7 +8270,7 @@
         <p:spPr>
           <a:xfrm>
             <a:off x="1078992" y="5184648"/>
-            <a:ext cx="4526280" cy="274320"/>
+            <a:ext cx="9555480" cy="274320"/>
           </a:xfrm>
           <a:prstGeom prst="rect">
             <a:avLst/>
@@ -8493,7 +8493,7 @@
         <p:spPr>
           <a:xfrm>
             <a:off x="1078992" y="5495544"/>
-            <a:ext cx="4526280" cy="274320"/>
+            <a:ext cx="9555480" cy="274320"/>
           </a:xfrm>
           <a:prstGeom prst="rect">
             <a:avLst/>
@@ -9307,7 +9307,7 @@
         <p:spPr>
           <a:xfrm>
             <a:off x="731520" y="4434840"/>
-            <a:ext cx="5029200" cy="1289304"/>
+            <a:ext cx="10058400" cy="1289304"/>
           </a:xfrm>
           <a:prstGeom prst="roundRect">
             <a:avLst>
@@ -9354,7 +9354,7 @@
         <p:spPr>
           <a:xfrm>
             <a:off x="932688" y="4581144"/>
-            <a:ext cx="4663440" cy="228600"/>
+            <a:ext cx="9692640" cy="228600"/>
           </a:xfrm>
           <a:prstGeom prst="rect">
             <a:avLst/>
@@ -9434,7 +9434,7 @@
         <p:spPr>
           <a:xfrm>
             <a:off x="1078992" y="4873752"/>
-            <a:ext cx="4526280" cy="274320"/>
+            <a:ext cx="9555480" cy="274320"/>
           </a:xfrm>
           <a:prstGeom prst="rect">
             <a:avLst/>
@@ -9580,7 +9580,7 @@
         <p:spPr>
           <a:xfrm>
             <a:off x="1078992" y="5184648"/>
-            <a:ext cx="4526280" cy="274320"/>
+            <a:ext cx="9555480" cy="274320"/>
           </a:xfrm>
           <a:prstGeom prst="rect">
             <a:avLst/>
@@ -9986,7 +9986,7 @@
                 <a:ea typeface="Sarabun"/>
                 <a:cs typeface="Sarabun"/>
               </a:rPr>
-              <a:t>Learner</a:t>
+              <a:t>You</a:t>
             </a:r>
           </a:p>
         </p:txBody>
@@ -10268,7 +10268,7 @@
                 <a:ea typeface="Sarabun"/>
                 <a:cs typeface="Sarabun"/>
               </a:rPr>
-              <a:t>Learner</a:t>
+              <a:t>You</a:t>
             </a:r>
           </a:p>
         </p:txBody>
@@ -10550,7 +10550,7 @@
                 <a:ea typeface="Sarabun"/>
                 <a:cs typeface="Sarabun"/>
               </a:rPr>
-              <a:t>Learner</a:t>
+              <a:t>You</a:t>
             </a:r>
           </a:p>
         </p:txBody>

--- a/course/modules/M01/L002/M01-L002-deck.pptx
+++ b/course/modules/M01/L002/M01-L002-deck.pptx
@@ -3106,23 +3106,28 @@
       <p:grpSpPr/>
       <p:sp>
         <p:nvSpPr>
-          <p:cNvPr id="2" name="Rectangle 1"/>
+          <p:cNvPr id="2" name="__pip_placeholder__"/>
           <p:cNvSpPr/>
           <p:nvPr/>
         </p:nvSpPr>
         <p:spPr>
           <a:xfrm>
-            <a:off x="8351215" y="3977640"/>
+            <a:off x="8351215" y="0"/>
             <a:ext cx="3840480" cy="2880360"/>
           </a:xfrm>
           <a:prstGeom prst="rect">
             <a:avLst/>
           </a:prstGeom>
           <a:solidFill>
-            <a:srgbClr val="DBE7EC"/>
+            <a:srgbClr val="DBE7EC">
+              <a:alpha val="30000"/>
+            </a:srgbClr>
           </a:solidFill>
-          <a:ln>
-            <a:noFill/>
+          <a:ln w="19050">
+            <a:solidFill>
+              <a:srgbClr val="355C7D"/>
+            </a:solidFill>
+            <a:prstDash val="sysDash"/>
           </a:ln>
         </p:spPr>
         <p:style>
@@ -3140,10 +3145,19 @@
           </a:fontRef>
         </p:style>
         <p:txBody>
-          <a:bodyPr rtlCol="0" anchor="ctr"/>
+          <a:bodyPr rtlCol="0" anchor="ctr" wrap="none"/>
           <a:lstStyle/>
           <a:p>
             <a:pPr algn="ctr"/>
+            <a:r>
+              <a:rPr sz="1800" b="1">
+                <a:solidFill>
+                  <a:srgbClr val="355C7D"/>
+                </a:solidFill>
+                <a:latin typeface="Sarabun"/>
+              </a:rPr>
+              <a:t>Nine</a:t>
+            </a:r>
           </a:p>
         </p:txBody>
       </p:sp>
@@ -3610,23 +3624,28 @@
       <p:grpSpPr/>
       <p:sp>
         <p:nvSpPr>
-          <p:cNvPr id="2" name="Rectangle 1"/>
+          <p:cNvPr id="2" name="__pip_placeholder__"/>
           <p:cNvSpPr/>
           <p:nvPr/>
         </p:nvSpPr>
         <p:spPr>
           <a:xfrm>
-            <a:off x="8351215" y="3977640"/>
+            <a:off x="8351215" y="0"/>
             <a:ext cx="3840480" cy="2880360"/>
           </a:xfrm>
           <a:prstGeom prst="rect">
             <a:avLst/>
           </a:prstGeom>
           <a:solidFill>
-            <a:srgbClr val="DBE7EC"/>
+            <a:srgbClr val="DBE7EC">
+              <a:alpha val="30000"/>
+            </a:srgbClr>
           </a:solidFill>
-          <a:ln>
-            <a:noFill/>
+          <a:ln w="19050">
+            <a:solidFill>
+              <a:srgbClr val="355C7D"/>
+            </a:solidFill>
+            <a:prstDash val="sysDash"/>
           </a:ln>
         </p:spPr>
         <p:style>
@@ -3644,10 +3663,19 @@
           </a:fontRef>
         </p:style>
         <p:txBody>
-          <a:bodyPr rtlCol="0" anchor="ctr"/>
+          <a:bodyPr rtlCol="0" anchor="ctr" wrap="none"/>
           <a:lstStyle/>
           <a:p>
             <a:pPr algn="ctr"/>
+            <a:r>
+              <a:rPr sz="1800" b="1">
+                <a:solidFill>
+                  <a:srgbClr val="355C7D"/>
+                </a:solidFill>
+                <a:latin typeface="Sarabun"/>
+              </a:rPr>
+              <a:t>Nine</a:t>
+            </a:r>
           </a:p>
         </p:txBody>
       </p:sp>
@@ -4313,23 +4341,28 @@
       <p:grpSpPr/>
       <p:sp>
         <p:nvSpPr>
-          <p:cNvPr id="2" name="Rectangle 1"/>
+          <p:cNvPr id="2" name="__pip_placeholder__"/>
           <p:cNvSpPr/>
           <p:nvPr/>
         </p:nvSpPr>
         <p:spPr>
           <a:xfrm>
-            <a:off x="8351215" y="3977640"/>
+            <a:off x="8351215" y="0"/>
             <a:ext cx="3840480" cy="2880360"/>
           </a:xfrm>
           <a:prstGeom prst="rect">
             <a:avLst/>
           </a:prstGeom>
           <a:solidFill>
-            <a:srgbClr val="DBE7EC"/>
+            <a:srgbClr val="DBE7EC">
+              <a:alpha val="30000"/>
+            </a:srgbClr>
           </a:solidFill>
-          <a:ln>
-            <a:noFill/>
+          <a:ln w="19050">
+            <a:solidFill>
+              <a:srgbClr val="355C7D"/>
+            </a:solidFill>
+            <a:prstDash val="sysDash"/>
           </a:ln>
         </p:spPr>
         <p:style>
@@ -4347,10 +4380,19 @@
           </a:fontRef>
         </p:style>
         <p:txBody>
-          <a:bodyPr rtlCol="0" anchor="ctr"/>
+          <a:bodyPr rtlCol="0" anchor="ctr" wrap="none"/>
           <a:lstStyle/>
           <a:p>
             <a:pPr algn="ctr"/>
+            <a:r>
+              <a:rPr sz="1800" b="1">
+                <a:solidFill>
+                  <a:srgbClr val="355C7D"/>
+                </a:solidFill>
+                <a:latin typeface="Sarabun"/>
+              </a:rPr>
+              <a:t>Nine</a:t>
+            </a:r>
           </a:p>
         </p:txBody>
       </p:sp>
@@ -5179,7 +5221,7 @@
         </p:nvSpPr>
         <p:spPr>
           <a:xfrm>
-            <a:off x="731520" y="4434840"/>
+            <a:off x="731520" y="8531352"/>
             <a:ext cx="10058400" cy="1636776"/>
           </a:xfrm>
           <a:prstGeom prst="roundRect">
@@ -5226,7 +5268,7 @@
         </p:nvSpPr>
         <p:spPr>
           <a:xfrm>
-            <a:off x="932688" y="4581144"/>
+            <a:off x="932688" y="8677656"/>
             <a:ext cx="9692640" cy="228600"/>
           </a:xfrm>
           <a:prstGeom prst="rect">
@@ -5263,7 +5305,7 @@
         </p:nvSpPr>
         <p:spPr>
           <a:xfrm>
-            <a:off x="932688" y="4965192"/>
+            <a:off x="932688" y="9061704"/>
             <a:ext cx="82296" cy="82296"/>
           </a:xfrm>
           <a:prstGeom prst="ellipse">
@@ -5306,7 +5348,7 @@
         </p:nvSpPr>
         <p:spPr>
           <a:xfrm>
-            <a:off x="1078992" y="4873752"/>
+            <a:off x="1078992" y="8970264"/>
             <a:ext cx="9555480" cy="274320"/>
           </a:xfrm>
           <a:prstGeom prst="rect">
@@ -5376,7 +5418,7 @@
         </p:nvSpPr>
         <p:spPr>
           <a:xfrm>
-            <a:off x="932688" y="5276088"/>
+            <a:off x="932688" y="9372600"/>
             <a:ext cx="82296" cy="82296"/>
           </a:xfrm>
           <a:prstGeom prst="ellipse">
@@ -5419,7 +5461,7 @@
         </p:nvSpPr>
         <p:spPr>
           <a:xfrm>
-            <a:off x="1078992" y="5184648"/>
+            <a:off x="1078992" y="9281160"/>
             <a:ext cx="9555480" cy="274320"/>
           </a:xfrm>
           <a:prstGeom prst="rect">
@@ -5555,7 +5597,7 @@
         </p:nvSpPr>
         <p:spPr>
           <a:xfrm>
-            <a:off x="932688" y="5586984"/>
+            <a:off x="932688" y="9683496"/>
             <a:ext cx="82296" cy="82296"/>
           </a:xfrm>
           <a:prstGeom prst="ellipse">
@@ -5598,7 +5640,7 @@
         </p:nvSpPr>
         <p:spPr>
           <a:xfrm>
-            <a:off x="1078992" y="5495544"/>
+            <a:off x="1078992" y="9592056"/>
             <a:ext cx="9555480" cy="274320"/>
           </a:xfrm>
           <a:prstGeom prst="rect">
@@ -5721,23 +5763,28 @@
       <p:grpSpPr/>
       <p:sp>
         <p:nvSpPr>
-          <p:cNvPr id="2" name="Rectangle 1"/>
+          <p:cNvPr id="2" name="__pip_placeholder__"/>
           <p:cNvSpPr/>
           <p:nvPr/>
         </p:nvSpPr>
         <p:spPr>
           <a:xfrm>
-            <a:off x="8351215" y="3977640"/>
+            <a:off x="8351215" y="0"/>
             <a:ext cx="3840480" cy="2880360"/>
           </a:xfrm>
           <a:prstGeom prst="rect">
             <a:avLst/>
           </a:prstGeom>
           <a:solidFill>
-            <a:srgbClr val="DBE7EC"/>
+            <a:srgbClr val="DBE7EC">
+              <a:alpha val="30000"/>
+            </a:srgbClr>
           </a:solidFill>
-          <a:ln>
-            <a:noFill/>
+          <a:ln w="19050">
+            <a:solidFill>
+              <a:srgbClr val="355C7D"/>
+            </a:solidFill>
+            <a:prstDash val="sysDash"/>
           </a:ln>
         </p:spPr>
         <p:style>
@@ -5755,10 +5802,19 @@
           </a:fontRef>
         </p:style>
         <p:txBody>
-          <a:bodyPr rtlCol="0" anchor="ctr"/>
+          <a:bodyPr rtlCol="0" anchor="ctr" wrap="none"/>
           <a:lstStyle/>
           <a:p>
             <a:pPr algn="ctr"/>
+            <a:r>
+              <a:rPr sz="1800" b="1">
+                <a:solidFill>
+                  <a:srgbClr val="355C7D"/>
+                </a:solidFill>
+                <a:latin typeface="Sarabun"/>
+              </a:rPr>
+              <a:t>Nine</a:t>
+            </a:r>
           </a:p>
         </p:txBody>
       </p:sp>
@@ -6587,7 +6643,7 @@
         </p:nvSpPr>
         <p:spPr>
           <a:xfrm>
-            <a:off x="731520" y="4434840"/>
+            <a:off x="731520" y="8531352"/>
             <a:ext cx="10058400" cy="1636776"/>
           </a:xfrm>
           <a:prstGeom prst="roundRect">
@@ -6634,7 +6690,7 @@
         </p:nvSpPr>
         <p:spPr>
           <a:xfrm>
-            <a:off x="932688" y="4581144"/>
+            <a:off x="932688" y="8677656"/>
             <a:ext cx="9692640" cy="228600"/>
           </a:xfrm>
           <a:prstGeom prst="rect">
@@ -6671,7 +6727,7 @@
         </p:nvSpPr>
         <p:spPr>
           <a:xfrm>
-            <a:off x="932688" y="4965192"/>
+            <a:off x="932688" y="9061704"/>
             <a:ext cx="82296" cy="82296"/>
           </a:xfrm>
           <a:prstGeom prst="ellipse">
@@ -6714,7 +6770,7 @@
         </p:nvSpPr>
         <p:spPr>
           <a:xfrm>
-            <a:off x="1078992" y="4873752"/>
+            <a:off x="1078992" y="8970264"/>
             <a:ext cx="9555480" cy="274320"/>
           </a:xfrm>
           <a:prstGeom prst="rect">
@@ -6872,7 +6928,7 @@
         </p:nvSpPr>
         <p:spPr>
           <a:xfrm>
-            <a:off x="932688" y="5276088"/>
+            <a:off x="932688" y="9372600"/>
             <a:ext cx="82296" cy="82296"/>
           </a:xfrm>
           <a:prstGeom prst="ellipse">
@@ -6915,7 +6971,7 @@
         </p:nvSpPr>
         <p:spPr>
           <a:xfrm>
-            <a:off x="1078992" y="5184648"/>
+            <a:off x="1078992" y="9281160"/>
             <a:ext cx="9555480" cy="274320"/>
           </a:xfrm>
           <a:prstGeom prst="rect">
@@ -7084,7 +7140,7 @@
         </p:nvSpPr>
         <p:spPr>
           <a:xfrm>
-            <a:off x="932688" y="5586984"/>
+            <a:off x="932688" y="9683496"/>
             <a:ext cx="82296" cy="82296"/>
           </a:xfrm>
           <a:prstGeom prst="ellipse">
@@ -7127,7 +7183,7 @@
         </p:nvSpPr>
         <p:spPr>
           <a:xfrm>
-            <a:off x="1078992" y="5495544"/>
+            <a:off x="1078992" y="9592056"/>
             <a:ext cx="9555480" cy="274320"/>
           </a:xfrm>
           <a:prstGeom prst="rect">
@@ -7217,23 +7273,28 @@
       <p:grpSpPr/>
       <p:sp>
         <p:nvSpPr>
-          <p:cNvPr id="2" name="Rectangle 1"/>
+          <p:cNvPr id="2" name="__pip_placeholder__"/>
           <p:cNvSpPr/>
           <p:nvPr/>
         </p:nvSpPr>
         <p:spPr>
           <a:xfrm>
-            <a:off x="8351215" y="3977640"/>
+            <a:off x="8351215" y="0"/>
             <a:ext cx="3840480" cy="2880360"/>
           </a:xfrm>
           <a:prstGeom prst="rect">
             <a:avLst/>
           </a:prstGeom>
           <a:solidFill>
-            <a:srgbClr val="DBE7EC"/>
+            <a:srgbClr val="DBE7EC">
+              <a:alpha val="30000"/>
+            </a:srgbClr>
           </a:solidFill>
-          <a:ln>
-            <a:noFill/>
+          <a:ln w="19050">
+            <a:solidFill>
+              <a:srgbClr val="355C7D"/>
+            </a:solidFill>
+            <a:prstDash val="sysDash"/>
           </a:ln>
         </p:spPr>
         <p:style>
@@ -7251,10 +7312,19 @@
           </a:fontRef>
         </p:style>
         <p:txBody>
-          <a:bodyPr rtlCol="0" anchor="ctr"/>
+          <a:bodyPr rtlCol="0" anchor="ctr" wrap="none"/>
           <a:lstStyle/>
           <a:p>
             <a:pPr algn="ctr"/>
+            <a:r>
+              <a:rPr sz="1800" b="1">
+                <a:solidFill>
+                  <a:srgbClr val="355C7D"/>
+                </a:solidFill>
+                <a:latin typeface="Sarabun"/>
+              </a:rPr>
+              <a:t>Nine</a:t>
+            </a:r>
           </a:p>
         </p:txBody>
       </p:sp>
@@ -7908,7 +7978,7 @@
         </p:nvSpPr>
         <p:spPr>
           <a:xfrm>
-            <a:off x="731520" y="4434840"/>
+            <a:off x="731520" y="6775704"/>
             <a:ext cx="10058400" cy="1636776"/>
           </a:xfrm>
           <a:prstGeom prst="roundRect">
@@ -7955,7 +8025,7 @@
         </p:nvSpPr>
         <p:spPr>
           <a:xfrm>
-            <a:off x="932688" y="4581144"/>
+            <a:off x="932688" y="6922008"/>
             <a:ext cx="9692640" cy="228600"/>
           </a:xfrm>
           <a:prstGeom prst="rect">
@@ -7992,7 +8062,7 @@
         </p:nvSpPr>
         <p:spPr>
           <a:xfrm>
-            <a:off x="932688" y="4965192"/>
+            <a:off x="932688" y="7306056"/>
             <a:ext cx="82296" cy="82296"/>
           </a:xfrm>
           <a:prstGeom prst="ellipse">
@@ -8035,7 +8105,7 @@
         </p:nvSpPr>
         <p:spPr>
           <a:xfrm>
-            <a:off x="1078992" y="4873752"/>
+            <a:off x="1078992" y="7214616"/>
             <a:ext cx="9555480" cy="274320"/>
           </a:xfrm>
           <a:prstGeom prst="rect">
@@ -8226,7 +8296,7 @@
         </p:nvSpPr>
         <p:spPr>
           <a:xfrm>
-            <a:off x="932688" y="5276088"/>
+            <a:off x="932688" y="7616952"/>
             <a:ext cx="82296" cy="82296"/>
           </a:xfrm>
           <a:prstGeom prst="ellipse">
@@ -8269,7 +8339,7 @@
         </p:nvSpPr>
         <p:spPr>
           <a:xfrm>
-            <a:off x="1078992" y="5184648"/>
+            <a:off x="1078992" y="7525512"/>
             <a:ext cx="9555480" cy="274320"/>
           </a:xfrm>
           <a:prstGeom prst="rect">
@@ -8449,7 +8519,7 @@
         </p:nvSpPr>
         <p:spPr>
           <a:xfrm>
-            <a:off x="932688" y="5586984"/>
+            <a:off x="932688" y="7927848"/>
             <a:ext cx="82296" cy="82296"/>
           </a:xfrm>
           <a:prstGeom prst="ellipse">
@@ -8492,7 +8562,7 @@
         </p:nvSpPr>
         <p:spPr>
           <a:xfrm>
-            <a:off x="1078992" y="5495544"/>
+            <a:off x="1078992" y="7836408"/>
             <a:ext cx="9555480" cy="274320"/>
           </a:xfrm>
           <a:prstGeom prst="rect">
@@ -8582,23 +8652,28 @@
       <p:grpSpPr/>
       <p:sp>
         <p:nvSpPr>
-          <p:cNvPr id="2" name="Rectangle 1"/>
+          <p:cNvPr id="2" name="__pip_placeholder__"/>
           <p:cNvSpPr/>
           <p:nvPr/>
         </p:nvSpPr>
         <p:spPr>
           <a:xfrm>
-            <a:off x="8351215" y="3977640"/>
+            <a:off x="8351215" y="0"/>
             <a:ext cx="3840480" cy="2880360"/>
           </a:xfrm>
           <a:prstGeom prst="rect">
             <a:avLst/>
           </a:prstGeom>
           <a:solidFill>
-            <a:srgbClr val="DBE7EC"/>
+            <a:srgbClr val="DBE7EC">
+              <a:alpha val="30000"/>
+            </a:srgbClr>
           </a:solidFill>
-          <a:ln>
-            <a:noFill/>
+          <a:ln w="19050">
+            <a:solidFill>
+              <a:srgbClr val="355C7D"/>
+            </a:solidFill>
+            <a:prstDash val="sysDash"/>
           </a:ln>
         </p:spPr>
         <p:style>
@@ -8616,10 +8691,19 @@
           </a:fontRef>
         </p:style>
         <p:txBody>
-          <a:bodyPr rtlCol="0" anchor="ctr"/>
+          <a:bodyPr rtlCol="0" anchor="ctr" wrap="none"/>
           <a:lstStyle/>
           <a:p>
             <a:pPr algn="ctr"/>
+            <a:r>
+              <a:rPr sz="1800" b="1">
+                <a:solidFill>
+                  <a:srgbClr val="355C7D"/>
+                </a:solidFill>
+                <a:latin typeface="Sarabun"/>
+              </a:rPr>
+              <a:t>Nine</a:t>
+            </a:r>
           </a:p>
         </p:txBody>
       </p:sp>
@@ -9306,7 +9390,7 @@
         </p:nvSpPr>
         <p:spPr>
           <a:xfrm>
-            <a:off x="731520" y="4434840"/>
+            <a:off x="731520" y="6775704"/>
             <a:ext cx="10058400" cy="1289304"/>
           </a:xfrm>
           <a:prstGeom prst="roundRect">
@@ -9353,7 +9437,7 @@
         </p:nvSpPr>
         <p:spPr>
           <a:xfrm>
-            <a:off x="932688" y="4581144"/>
+            <a:off x="932688" y="6922008"/>
             <a:ext cx="9692640" cy="228600"/>
           </a:xfrm>
           <a:prstGeom prst="rect">
@@ -9390,7 +9474,7 @@
         </p:nvSpPr>
         <p:spPr>
           <a:xfrm>
-            <a:off x="932688" y="4965192"/>
+            <a:off x="932688" y="7306056"/>
             <a:ext cx="82296" cy="82296"/>
           </a:xfrm>
           <a:prstGeom prst="ellipse">
@@ -9433,7 +9517,7 @@
         </p:nvSpPr>
         <p:spPr>
           <a:xfrm>
-            <a:off x="1078992" y="4873752"/>
+            <a:off x="1078992" y="7214616"/>
             <a:ext cx="9555480" cy="274320"/>
           </a:xfrm>
           <a:prstGeom prst="rect">
@@ -9536,7 +9620,7 @@
         </p:nvSpPr>
         <p:spPr>
           <a:xfrm>
-            <a:off x="932688" y="5276088"/>
+            <a:off x="932688" y="7616952"/>
             <a:ext cx="82296" cy="82296"/>
           </a:xfrm>
           <a:prstGeom prst="ellipse">
@@ -9579,7 +9663,7 @@
         </p:nvSpPr>
         <p:spPr>
           <a:xfrm>
-            <a:off x="1078992" y="5184648"/>
+            <a:off x="1078992" y="7525512"/>
             <a:ext cx="9555480" cy="274320"/>
           </a:xfrm>
           <a:prstGeom prst="rect">
@@ -9636,23 +9720,28 @@
       <p:grpSpPr/>
       <p:sp>
         <p:nvSpPr>
-          <p:cNvPr id="2" name="Rectangle 1"/>
+          <p:cNvPr id="2" name="__pip_placeholder__"/>
           <p:cNvSpPr/>
           <p:nvPr/>
         </p:nvSpPr>
         <p:spPr>
           <a:xfrm>
-            <a:off x="8351215" y="3977640"/>
+            <a:off x="8351215" y="0"/>
             <a:ext cx="3840480" cy="2880360"/>
           </a:xfrm>
           <a:prstGeom prst="rect">
             <a:avLst/>
           </a:prstGeom>
           <a:solidFill>
-            <a:srgbClr val="DBE7EC"/>
+            <a:srgbClr val="DBE7EC">
+              <a:alpha val="30000"/>
+            </a:srgbClr>
           </a:solidFill>
-          <a:ln>
-            <a:noFill/>
+          <a:ln w="19050">
+            <a:solidFill>
+              <a:srgbClr val="355C7D"/>
+            </a:solidFill>
+            <a:prstDash val="sysDash"/>
           </a:ln>
         </p:spPr>
         <p:style>
@@ -9670,10 +9759,19 @@
           </a:fontRef>
         </p:style>
         <p:txBody>
-          <a:bodyPr rtlCol="0" anchor="ctr"/>
+          <a:bodyPr rtlCol="0" anchor="ctr" wrap="none"/>
           <a:lstStyle/>
           <a:p>
             <a:pPr algn="ctr"/>
+            <a:r>
+              <a:rPr sz="1800" b="1">
+                <a:solidFill>
+                  <a:srgbClr val="355C7D"/>
+                </a:solidFill>
+                <a:latin typeface="Sarabun"/>
+              </a:rPr>
+              <a:t>Nine</a:t>
+            </a:r>
           </a:p>
         </p:txBody>
       </p:sp>
@@ -10668,23 +10766,28 @@
       <p:grpSpPr/>
       <p:sp>
         <p:nvSpPr>
-          <p:cNvPr id="2" name="Rectangle 1"/>
+          <p:cNvPr id="2" name="__pip_placeholder__"/>
           <p:cNvSpPr/>
           <p:nvPr/>
         </p:nvSpPr>
         <p:spPr>
           <a:xfrm>
-            <a:off x="8351215" y="3977640"/>
+            <a:off x="8351215" y="0"/>
             <a:ext cx="3840480" cy="2880360"/>
           </a:xfrm>
           <a:prstGeom prst="rect">
             <a:avLst/>
           </a:prstGeom>
           <a:solidFill>
-            <a:srgbClr val="DBE7EC"/>
+            <a:srgbClr val="DBE7EC">
+              <a:alpha val="30000"/>
+            </a:srgbClr>
           </a:solidFill>
-          <a:ln>
-            <a:noFill/>
+          <a:ln w="19050">
+            <a:solidFill>
+              <a:srgbClr val="355C7D"/>
+            </a:solidFill>
+            <a:prstDash val="sysDash"/>
           </a:ln>
         </p:spPr>
         <p:style>
@@ -10702,10 +10805,19 @@
           </a:fontRef>
         </p:style>
         <p:txBody>
-          <a:bodyPr rtlCol="0" anchor="ctr"/>
+          <a:bodyPr rtlCol="0" anchor="ctr" wrap="none"/>
           <a:lstStyle/>
           <a:p>
             <a:pPr algn="ctr"/>
+            <a:r>
+              <a:rPr sz="1800" b="1">
+                <a:solidFill>
+                  <a:srgbClr val="355C7D"/>
+                </a:solidFill>
+                <a:latin typeface="Sarabun"/>
+              </a:rPr>
+              <a:t>Nine</a:t>
+            </a:r>
           </a:p>
         </p:txBody>
       </p:sp>
@@ -11799,23 +11911,28 @@
       <p:grpSpPr/>
       <p:sp>
         <p:nvSpPr>
-          <p:cNvPr id="2" name="Rectangle 1"/>
+          <p:cNvPr id="2" name="__pip_placeholder__"/>
           <p:cNvSpPr/>
           <p:nvPr/>
         </p:nvSpPr>
         <p:spPr>
           <a:xfrm>
-            <a:off x="8351215" y="3977640"/>
+            <a:off x="8351215" y="0"/>
             <a:ext cx="3840480" cy="2880360"/>
           </a:xfrm>
           <a:prstGeom prst="rect">
             <a:avLst/>
           </a:prstGeom>
           <a:solidFill>
-            <a:srgbClr val="DBE7EC"/>
+            <a:srgbClr val="DBE7EC">
+              <a:alpha val="30000"/>
+            </a:srgbClr>
           </a:solidFill>
-          <a:ln>
-            <a:noFill/>
+          <a:ln w="19050">
+            <a:solidFill>
+              <a:srgbClr val="355C7D"/>
+            </a:solidFill>
+            <a:prstDash val="sysDash"/>
           </a:ln>
         </p:spPr>
         <p:style>
@@ -11833,10 +11950,19 @@
           </a:fontRef>
         </p:style>
         <p:txBody>
-          <a:bodyPr rtlCol="0" anchor="ctr"/>
+          <a:bodyPr rtlCol="0" anchor="ctr" wrap="none"/>
           <a:lstStyle/>
           <a:p>
             <a:pPr algn="ctr"/>
+            <a:r>
+              <a:rPr sz="1800" b="1">
+                <a:solidFill>
+                  <a:srgbClr val="355C7D"/>
+                </a:solidFill>
+                <a:latin typeface="Sarabun"/>
+              </a:rPr>
+              <a:t>Nine</a:t>
+            </a:r>
           </a:p>
         </p:txBody>
       </p:sp>

--- a/course/modules/M01/L002/M01-L002-deck.pptx
+++ b/course/modules/M01/L002/M01-L002-deck.pptx
@@ -3213,7 +3213,7 @@
         <p:spPr>
           <a:xfrm>
             <a:off x="731520" y="1600200"/>
-            <a:ext cx="10058400" cy="228600"/>
+            <a:ext cx="7436815" cy="228600"/>
           </a:xfrm>
           <a:prstGeom prst="rect">
             <a:avLst/>
@@ -3250,7 +3250,7 @@
         <p:spPr>
           <a:xfrm>
             <a:off x="731520" y="1993392"/>
-            <a:ext cx="10058400" cy="329184"/>
+            <a:ext cx="7436815" cy="329184"/>
           </a:xfrm>
           <a:prstGeom prst="rect">
             <a:avLst/>
@@ -3287,7 +3287,7 @@
         <p:spPr>
           <a:xfrm>
             <a:off x="731520" y="2542032"/>
-            <a:ext cx="10058400" cy="822960"/>
+            <a:ext cx="7436815" cy="822960"/>
           </a:xfrm>
           <a:prstGeom prst="rect">
             <a:avLst/>
@@ -3731,7 +3731,7 @@
         <p:spPr>
           <a:xfrm>
             <a:off x="731520" y="256032"/>
-            <a:ext cx="10058400" cy="256032"/>
+            <a:ext cx="7436815" cy="256032"/>
           </a:xfrm>
           <a:prstGeom prst="rect">
             <a:avLst/>
@@ -3768,7 +3768,7 @@
         <p:spPr>
           <a:xfrm>
             <a:off x="731520" y="530352"/>
-            <a:ext cx="10058400" cy="457200"/>
+            <a:ext cx="7436815" cy="457200"/>
           </a:xfrm>
           <a:prstGeom prst="rect">
             <a:avLst/>
@@ -4448,7 +4448,7 @@
         <p:spPr>
           <a:xfrm>
             <a:off x="731520" y="256032"/>
-            <a:ext cx="10058400" cy="256032"/>
+            <a:ext cx="7436815" cy="256032"/>
           </a:xfrm>
           <a:prstGeom prst="rect">
             <a:avLst/>
@@ -4485,7 +4485,7 @@
         <p:spPr>
           <a:xfrm>
             <a:off x="731520" y="530352"/>
-            <a:ext cx="10058400" cy="457200"/>
+            <a:ext cx="7436815" cy="457200"/>
           </a:xfrm>
           <a:prstGeom prst="rect">
             <a:avLst/>
@@ -4522,7 +4522,7 @@
         <p:spPr>
           <a:xfrm>
             <a:off x="731520" y="1325880"/>
-            <a:ext cx="5029200" cy="1572768"/>
+            <a:ext cx="4090248" cy="1572768"/>
           </a:xfrm>
           <a:prstGeom prst="roundRect">
             <a:avLst>
@@ -4612,7 +4612,7 @@
         <p:spPr>
           <a:xfrm>
             <a:off x="1078992" y="1435608"/>
-            <a:ext cx="4572000" cy="658368"/>
+            <a:ext cx="3633048" cy="658368"/>
           </a:xfrm>
           <a:prstGeom prst="rect">
             <a:avLst/>
@@ -4660,7 +4660,7 @@
         <p:spPr>
           <a:xfrm>
             <a:off x="1078992" y="2203704"/>
-            <a:ext cx="4572000" cy="274320"/>
+            <a:ext cx="3633048" cy="274320"/>
           </a:xfrm>
           <a:prstGeom prst="rect">
             <a:avLst/>
@@ -4697,7 +4697,7 @@
         <p:spPr>
           <a:xfrm>
             <a:off x="731520" y="3081528"/>
-            <a:ext cx="5029200" cy="1572768"/>
+            <a:ext cx="4090248" cy="1572768"/>
           </a:xfrm>
           <a:prstGeom prst="roundRect">
             <a:avLst>
@@ -4787,7 +4787,7 @@
         <p:spPr>
           <a:xfrm>
             <a:off x="1078992" y="3191256"/>
-            <a:ext cx="4572000" cy="658368"/>
+            <a:ext cx="3633048" cy="658368"/>
           </a:xfrm>
           <a:prstGeom prst="rect">
             <a:avLst/>
@@ -4835,7 +4835,7 @@
         <p:spPr>
           <a:xfrm>
             <a:off x="1078992" y="3959352"/>
-            <a:ext cx="4572000" cy="274320"/>
+            <a:ext cx="3633048" cy="274320"/>
           </a:xfrm>
           <a:prstGeom prst="rect">
             <a:avLst/>
@@ -4872,7 +4872,7 @@
         <p:spPr>
           <a:xfrm>
             <a:off x="731520" y="4837176"/>
-            <a:ext cx="5029200" cy="1572768"/>
+            <a:ext cx="4090248" cy="1572768"/>
           </a:xfrm>
           <a:prstGeom prst="roundRect">
             <a:avLst>
@@ -4962,7 +4962,7 @@
         <p:spPr>
           <a:xfrm>
             <a:off x="1078992" y="4946904"/>
-            <a:ext cx="4572000" cy="658368"/>
+            <a:ext cx="3633048" cy="658368"/>
           </a:xfrm>
           <a:prstGeom prst="rect">
             <a:avLst/>
@@ -5010,7 +5010,7 @@
         <p:spPr>
           <a:xfrm>
             <a:off x="1078992" y="5715000"/>
-            <a:ext cx="4572000" cy="274320"/>
+            <a:ext cx="3633048" cy="274320"/>
           </a:xfrm>
           <a:prstGeom prst="rect">
             <a:avLst/>
@@ -5047,7 +5047,7 @@
         <p:spPr>
           <a:xfrm>
             <a:off x="731520" y="6592824"/>
-            <a:ext cx="5029200" cy="1572768"/>
+            <a:ext cx="4090248" cy="1572768"/>
           </a:xfrm>
           <a:prstGeom prst="roundRect">
             <a:avLst>
@@ -5137,7 +5137,7 @@
         <p:spPr>
           <a:xfrm>
             <a:off x="1078992" y="6702552"/>
-            <a:ext cx="4572000" cy="658368"/>
+            <a:ext cx="3633048" cy="658368"/>
           </a:xfrm>
           <a:prstGeom prst="rect">
             <a:avLst/>
@@ -5185,7 +5185,7 @@
         <p:spPr>
           <a:xfrm>
             <a:off x="1078992" y="7470648"/>
-            <a:ext cx="4572000" cy="274320"/>
+            <a:ext cx="3633048" cy="274320"/>
           </a:xfrm>
           <a:prstGeom prst="rect">
             <a:avLst/>
@@ -5870,7 +5870,7 @@
         <p:spPr>
           <a:xfrm>
             <a:off x="731520" y="256032"/>
-            <a:ext cx="10058400" cy="256032"/>
+            <a:ext cx="7436815" cy="256032"/>
           </a:xfrm>
           <a:prstGeom prst="rect">
             <a:avLst/>
@@ -5907,7 +5907,7 @@
         <p:spPr>
           <a:xfrm>
             <a:off x="731520" y="530352"/>
-            <a:ext cx="10058400" cy="457200"/>
+            <a:ext cx="7436815" cy="457200"/>
           </a:xfrm>
           <a:prstGeom prst="rect">
             <a:avLst/>
@@ -5944,7 +5944,7 @@
         <p:spPr>
           <a:xfrm>
             <a:off x="731520" y="1325880"/>
-            <a:ext cx="5029200" cy="1572768"/>
+            <a:ext cx="4090248" cy="1572768"/>
           </a:xfrm>
           <a:prstGeom prst="roundRect">
             <a:avLst>
@@ -6034,7 +6034,7 @@
         <p:spPr>
           <a:xfrm>
             <a:off x="1078992" y="1435608"/>
-            <a:ext cx="4572000" cy="658368"/>
+            <a:ext cx="3633048" cy="658368"/>
           </a:xfrm>
           <a:prstGeom prst="rect">
             <a:avLst/>
@@ -6082,7 +6082,7 @@
         <p:spPr>
           <a:xfrm>
             <a:off x="1078992" y="2203704"/>
-            <a:ext cx="4572000" cy="274320"/>
+            <a:ext cx="3633048" cy="274320"/>
           </a:xfrm>
           <a:prstGeom prst="rect">
             <a:avLst/>
@@ -6119,7 +6119,7 @@
         <p:spPr>
           <a:xfrm>
             <a:off x="731520" y="3081528"/>
-            <a:ext cx="5029200" cy="1572768"/>
+            <a:ext cx="4090248" cy="1572768"/>
           </a:xfrm>
           <a:prstGeom prst="roundRect">
             <a:avLst>
@@ -6209,7 +6209,7 @@
         <p:spPr>
           <a:xfrm>
             <a:off x="1078992" y="3191256"/>
-            <a:ext cx="4572000" cy="658368"/>
+            <a:ext cx="3633048" cy="658368"/>
           </a:xfrm>
           <a:prstGeom prst="rect">
             <a:avLst/>
@@ -6257,7 +6257,7 @@
         <p:spPr>
           <a:xfrm>
             <a:off x="1078992" y="3959352"/>
-            <a:ext cx="4572000" cy="274320"/>
+            <a:ext cx="3633048" cy="274320"/>
           </a:xfrm>
           <a:prstGeom prst="rect">
             <a:avLst/>
@@ -6294,7 +6294,7 @@
         <p:spPr>
           <a:xfrm>
             <a:off x="731520" y="4837176"/>
-            <a:ext cx="5029200" cy="1572768"/>
+            <a:ext cx="4090248" cy="1572768"/>
           </a:xfrm>
           <a:prstGeom prst="roundRect">
             <a:avLst>
@@ -6384,7 +6384,7 @@
         <p:spPr>
           <a:xfrm>
             <a:off x="1078992" y="4946904"/>
-            <a:ext cx="4572000" cy="658368"/>
+            <a:ext cx="3633048" cy="658368"/>
           </a:xfrm>
           <a:prstGeom prst="rect">
             <a:avLst/>
@@ -6432,7 +6432,7 @@
         <p:spPr>
           <a:xfrm>
             <a:off x="1078992" y="5715000"/>
-            <a:ext cx="4572000" cy="274320"/>
+            <a:ext cx="3633048" cy="274320"/>
           </a:xfrm>
           <a:prstGeom prst="rect">
             <a:avLst/>
@@ -6469,7 +6469,7 @@
         <p:spPr>
           <a:xfrm>
             <a:off x="731520" y="6592824"/>
-            <a:ext cx="5029200" cy="1572768"/>
+            <a:ext cx="4090248" cy="1572768"/>
           </a:xfrm>
           <a:prstGeom prst="roundRect">
             <a:avLst>
@@ -6559,7 +6559,7 @@
         <p:spPr>
           <a:xfrm>
             <a:off x="1078992" y="6702552"/>
-            <a:ext cx="4572000" cy="658368"/>
+            <a:ext cx="3633048" cy="658368"/>
           </a:xfrm>
           <a:prstGeom prst="rect">
             <a:avLst/>
@@ -6607,7 +6607,7 @@
         <p:spPr>
           <a:xfrm>
             <a:off x="1078992" y="7470648"/>
-            <a:ext cx="4572000" cy="274320"/>
+            <a:ext cx="3633048" cy="274320"/>
           </a:xfrm>
           <a:prstGeom prst="rect">
             <a:avLst/>
@@ -7380,7 +7380,7 @@
         <p:spPr>
           <a:xfrm>
             <a:off x="731520" y="256032"/>
-            <a:ext cx="10058400" cy="256032"/>
+            <a:ext cx="7436815" cy="256032"/>
           </a:xfrm>
           <a:prstGeom prst="rect">
             <a:avLst/>
@@ -7417,7 +7417,7 @@
         <p:spPr>
           <a:xfrm>
             <a:off x="731520" y="530352"/>
-            <a:ext cx="10058400" cy="457200"/>
+            <a:ext cx="7436815" cy="457200"/>
           </a:xfrm>
           <a:prstGeom prst="rect">
             <a:avLst/>
@@ -7454,7 +7454,7 @@
         <p:spPr>
           <a:xfrm>
             <a:off x="731520" y="1325880"/>
-            <a:ext cx="5029200" cy="1572768"/>
+            <a:ext cx="4090248" cy="1572768"/>
           </a:xfrm>
           <a:prstGeom prst="roundRect">
             <a:avLst>
@@ -7544,7 +7544,7 @@
         <p:spPr>
           <a:xfrm>
             <a:off x="1078992" y="1435608"/>
-            <a:ext cx="4572000" cy="658368"/>
+            <a:ext cx="3633048" cy="658368"/>
           </a:xfrm>
           <a:prstGeom prst="rect">
             <a:avLst/>
@@ -7592,7 +7592,7 @@
         <p:spPr>
           <a:xfrm>
             <a:off x="1078992" y="2203704"/>
-            <a:ext cx="4572000" cy="274320"/>
+            <a:ext cx="3633048" cy="274320"/>
           </a:xfrm>
           <a:prstGeom prst="rect">
             <a:avLst/>
@@ -7629,7 +7629,7 @@
         <p:spPr>
           <a:xfrm>
             <a:off x="731520" y="3081528"/>
-            <a:ext cx="5029200" cy="1572768"/>
+            <a:ext cx="4090248" cy="1572768"/>
           </a:xfrm>
           <a:prstGeom prst="roundRect">
             <a:avLst>
@@ -7719,7 +7719,7 @@
         <p:spPr>
           <a:xfrm>
             <a:off x="1078992" y="3191256"/>
-            <a:ext cx="4572000" cy="658368"/>
+            <a:ext cx="3633048" cy="658368"/>
           </a:xfrm>
           <a:prstGeom prst="rect">
             <a:avLst/>
@@ -7767,7 +7767,7 @@
         <p:spPr>
           <a:xfrm>
             <a:off x="1078992" y="3959352"/>
-            <a:ext cx="4572000" cy="274320"/>
+            <a:ext cx="3633048" cy="274320"/>
           </a:xfrm>
           <a:prstGeom prst="rect">
             <a:avLst/>
@@ -7804,7 +7804,7 @@
         <p:spPr>
           <a:xfrm>
             <a:off x="731520" y="4837176"/>
-            <a:ext cx="5029200" cy="1572768"/>
+            <a:ext cx="4090248" cy="1572768"/>
           </a:xfrm>
           <a:prstGeom prst="roundRect">
             <a:avLst>
@@ -7894,7 +7894,7 @@
         <p:spPr>
           <a:xfrm>
             <a:off x="1078992" y="4946904"/>
-            <a:ext cx="4572000" cy="658368"/>
+            <a:ext cx="3633048" cy="658368"/>
           </a:xfrm>
           <a:prstGeom prst="rect">
             <a:avLst/>
@@ -7942,7 +7942,7 @@
         <p:spPr>
           <a:xfrm>
             <a:off x="1078992" y="5715000"/>
-            <a:ext cx="4572000" cy="274320"/>
+            <a:ext cx="3633048" cy="274320"/>
           </a:xfrm>
           <a:prstGeom prst="rect">
             <a:avLst/>
@@ -8759,7 +8759,7 @@
         <p:spPr>
           <a:xfrm>
             <a:off x="731520" y="256032"/>
-            <a:ext cx="10058400" cy="256032"/>
+            <a:ext cx="7436815" cy="256032"/>
           </a:xfrm>
           <a:prstGeom prst="rect">
             <a:avLst/>
@@ -8796,7 +8796,7 @@
         <p:spPr>
           <a:xfrm>
             <a:off x="731520" y="530352"/>
-            <a:ext cx="10058400" cy="457200"/>
+            <a:ext cx="7436815" cy="457200"/>
           </a:xfrm>
           <a:prstGeom prst="rect">
             <a:avLst/>
@@ -8866,7 +8866,7 @@
         <p:spPr>
           <a:xfrm>
             <a:off x="731520" y="1325880"/>
-            <a:ext cx="5029200" cy="1572768"/>
+            <a:ext cx="4090248" cy="1572768"/>
           </a:xfrm>
           <a:prstGeom prst="roundRect">
             <a:avLst>
@@ -8956,7 +8956,7 @@
         <p:spPr>
           <a:xfrm>
             <a:off x="1078992" y="1435608"/>
-            <a:ext cx="4572000" cy="658368"/>
+            <a:ext cx="3633048" cy="658368"/>
           </a:xfrm>
           <a:prstGeom prst="rect">
             <a:avLst/>
@@ -9004,7 +9004,7 @@
         <p:spPr>
           <a:xfrm>
             <a:off x="1078992" y="2203704"/>
-            <a:ext cx="4572000" cy="274320"/>
+            <a:ext cx="3633048" cy="274320"/>
           </a:xfrm>
           <a:prstGeom prst="rect">
             <a:avLst/>
@@ -9041,7 +9041,7 @@
         <p:spPr>
           <a:xfrm>
             <a:off x="731520" y="3081528"/>
-            <a:ext cx="5029200" cy="1572768"/>
+            <a:ext cx="4090248" cy="1572768"/>
           </a:xfrm>
           <a:prstGeom prst="roundRect">
             <a:avLst>
@@ -9131,7 +9131,7 @@
         <p:spPr>
           <a:xfrm>
             <a:off x="1078992" y="3191256"/>
-            <a:ext cx="4572000" cy="658368"/>
+            <a:ext cx="3633048" cy="658368"/>
           </a:xfrm>
           <a:prstGeom prst="rect">
             <a:avLst/>
@@ -9179,7 +9179,7 @@
         <p:spPr>
           <a:xfrm>
             <a:off x="1078992" y="3959352"/>
-            <a:ext cx="4572000" cy="274320"/>
+            <a:ext cx="3633048" cy="274320"/>
           </a:xfrm>
           <a:prstGeom prst="rect">
             <a:avLst/>
@@ -9216,7 +9216,7 @@
         <p:spPr>
           <a:xfrm>
             <a:off x="731520" y="4837176"/>
-            <a:ext cx="5029200" cy="1572768"/>
+            <a:ext cx="4090248" cy="1572768"/>
           </a:xfrm>
           <a:prstGeom prst="roundRect">
             <a:avLst>
@@ -9306,7 +9306,7 @@
         <p:spPr>
           <a:xfrm>
             <a:off x="1078992" y="4946904"/>
-            <a:ext cx="4572000" cy="658368"/>
+            <a:ext cx="3633048" cy="658368"/>
           </a:xfrm>
           <a:prstGeom prst="rect">
             <a:avLst/>
@@ -9354,7 +9354,7 @@
         <p:spPr>
           <a:xfrm>
             <a:off x="1078992" y="5715000"/>
-            <a:ext cx="4572000" cy="274320"/>
+            <a:ext cx="3633048" cy="274320"/>
           </a:xfrm>
           <a:prstGeom prst="rect">
             <a:avLst/>
@@ -9827,7 +9827,7 @@
         <p:spPr>
           <a:xfrm>
             <a:off x="731520" y="256032"/>
-            <a:ext cx="10058400" cy="256032"/>
+            <a:ext cx="7436815" cy="256032"/>
           </a:xfrm>
           <a:prstGeom prst="rect">
             <a:avLst/>
@@ -9864,7 +9864,7 @@
         <p:spPr>
           <a:xfrm>
             <a:off x="731520" y="530352"/>
-            <a:ext cx="10058400" cy="457200"/>
+            <a:ext cx="7436815" cy="457200"/>
           </a:xfrm>
           <a:prstGeom prst="rect">
             <a:avLst/>
@@ -9957,7 +9957,7 @@
         <p:spPr>
           <a:xfrm>
             <a:off x="1965960" y="1069848"/>
-            <a:ext cx="8366760" cy="384048"/>
+            <a:ext cx="6202375" cy="384048"/>
           </a:xfrm>
           <a:prstGeom prst="rect">
             <a:avLst/>
@@ -10005,7 +10005,7 @@
         <p:spPr>
           <a:xfrm>
             <a:off x="1965960" y="1353312"/>
-            <a:ext cx="8366760" cy="228600"/>
+            <a:ext cx="6202375" cy="228600"/>
           </a:xfrm>
           <a:prstGeom prst="rect">
             <a:avLst/>
@@ -10098,7 +10098,7 @@
         <p:spPr>
           <a:xfrm>
             <a:off x="1965960" y="1847088"/>
-            <a:ext cx="8366760" cy="384048"/>
+            <a:ext cx="6202375" cy="384048"/>
           </a:xfrm>
           <a:prstGeom prst="rect">
             <a:avLst/>
@@ -10146,7 +10146,7 @@
         <p:spPr>
           <a:xfrm>
             <a:off x="1965960" y="2130552"/>
-            <a:ext cx="8366760" cy="228600"/>
+            <a:ext cx="6202375" cy="228600"/>
           </a:xfrm>
           <a:prstGeom prst="rect">
             <a:avLst/>
@@ -10239,7 +10239,7 @@
         <p:spPr>
           <a:xfrm>
             <a:off x="1965960" y="2624328"/>
-            <a:ext cx="8366760" cy="384048"/>
+            <a:ext cx="6202375" cy="384048"/>
           </a:xfrm>
           <a:prstGeom prst="rect">
             <a:avLst/>
@@ -10287,7 +10287,7 @@
         <p:spPr>
           <a:xfrm>
             <a:off x="1965960" y="2907792"/>
-            <a:ext cx="8366760" cy="228600"/>
+            <a:ext cx="6202375" cy="228600"/>
           </a:xfrm>
           <a:prstGeom prst="rect">
             <a:avLst/>
@@ -10380,7 +10380,7 @@
         <p:spPr>
           <a:xfrm>
             <a:off x="1965960" y="3401568"/>
-            <a:ext cx="8366760" cy="384048"/>
+            <a:ext cx="8823960" cy="384048"/>
           </a:xfrm>
           <a:prstGeom prst="rect">
             <a:avLst/>
@@ -10428,7 +10428,7 @@
         <p:spPr>
           <a:xfrm>
             <a:off x="1965960" y="3685032"/>
-            <a:ext cx="8366760" cy="228600"/>
+            <a:ext cx="8823960" cy="228600"/>
           </a:xfrm>
           <a:prstGeom prst="rect">
             <a:avLst/>
@@ -10521,7 +10521,7 @@
         <p:spPr>
           <a:xfrm>
             <a:off x="1965960" y="4178808"/>
-            <a:ext cx="8366760" cy="384048"/>
+            <a:ext cx="8823960" cy="384048"/>
           </a:xfrm>
           <a:prstGeom prst="rect">
             <a:avLst/>
@@ -10569,7 +10569,7 @@
         <p:spPr>
           <a:xfrm>
             <a:off x="1965960" y="4462272"/>
-            <a:ext cx="8366760" cy="228600"/>
+            <a:ext cx="8823960" cy="228600"/>
           </a:xfrm>
           <a:prstGeom prst="rect">
             <a:avLst/>
@@ -10662,7 +10662,7 @@
         <p:spPr>
           <a:xfrm>
             <a:off x="1965960" y="4956048"/>
-            <a:ext cx="8366760" cy="384048"/>
+            <a:ext cx="8823960" cy="384048"/>
           </a:xfrm>
           <a:prstGeom prst="rect">
             <a:avLst/>
@@ -10710,7 +10710,7 @@
         <p:spPr>
           <a:xfrm>
             <a:off x="1965960" y="5239512"/>
-            <a:ext cx="8366760" cy="228600"/>
+            <a:ext cx="8823960" cy="228600"/>
           </a:xfrm>
           <a:prstGeom prst="rect">
             <a:avLst/>
@@ -10873,7 +10873,7 @@
         <p:spPr>
           <a:xfrm>
             <a:off x="731520" y="256032"/>
-            <a:ext cx="10058400" cy="256032"/>
+            <a:ext cx="7436815" cy="256032"/>
           </a:xfrm>
           <a:prstGeom prst="rect">
             <a:avLst/>
@@ -10910,7 +10910,7 @@
         <p:spPr>
           <a:xfrm>
             <a:off x="731520" y="530352"/>
-            <a:ext cx="10058400" cy="457200"/>
+            <a:ext cx="7436815" cy="457200"/>
           </a:xfrm>
           <a:prstGeom prst="rect">
             <a:avLst/>
@@ -10947,7 +10947,7 @@
         <p:spPr>
           <a:xfrm>
             <a:off x="731520" y="1417320"/>
-            <a:ext cx="9601200" cy="2331720"/>
+            <a:ext cx="7436815" cy="2331720"/>
           </a:xfrm>
           <a:prstGeom prst="roundRect">
             <a:avLst>
@@ -10994,7 +10994,7 @@
         <p:spPr>
           <a:xfrm>
             <a:off x="932688" y="1563624"/>
-            <a:ext cx="9235440" cy="228600"/>
+            <a:ext cx="7071055" cy="228600"/>
           </a:xfrm>
           <a:prstGeom prst="rect">
             <a:avLst/>
@@ -11074,7 +11074,7 @@
         <p:spPr>
           <a:xfrm>
             <a:off x="1078992" y="1856232"/>
-            <a:ext cx="9098280" cy="274320"/>
+            <a:ext cx="6933895" cy="274320"/>
           </a:xfrm>
           <a:prstGeom prst="rect">
             <a:avLst/>
@@ -11187,7 +11187,7 @@
         <p:spPr>
           <a:xfrm>
             <a:off x="1078992" y="2167128"/>
-            <a:ext cx="9098280" cy="274320"/>
+            <a:ext cx="6933895" cy="274320"/>
           </a:xfrm>
           <a:prstGeom prst="rect">
             <a:avLst/>
@@ -11300,7 +11300,7 @@
         <p:spPr>
           <a:xfrm>
             <a:off x="1078992" y="2478024"/>
-            <a:ext cx="9098280" cy="274320"/>
+            <a:ext cx="6933895" cy="274320"/>
           </a:xfrm>
           <a:prstGeom prst="rect">
             <a:avLst/>
@@ -11446,7 +11446,7 @@
         <p:spPr>
           <a:xfrm>
             <a:off x="1078992" y="2788920"/>
-            <a:ext cx="9098280" cy="274320"/>
+            <a:ext cx="6933895" cy="274320"/>
           </a:xfrm>
           <a:prstGeom prst="rect">
             <a:avLst/>
@@ -11559,7 +11559,7 @@
         <p:spPr>
           <a:xfrm>
             <a:off x="1078992" y="3099816"/>
-            <a:ext cx="9098280" cy="274320"/>
+            <a:ext cx="6933895" cy="274320"/>
           </a:xfrm>
           <a:prstGeom prst="rect">
             <a:avLst/>
@@ -11662,7 +11662,7 @@
         <p:spPr>
           <a:xfrm>
             <a:off x="731520" y="4160520"/>
-            <a:ext cx="9601200" cy="1289304"/>
+            <a:ext cx="10058400" cy="1289304"/>
           </a:xfrm>
           <a:prstGeom prst="roundRect">
             <a:avLst>
@@ -11709,7 +11709,7 @@
         <p:spPr>
           <a:xfrm>
             <a:off x="932688" y="4306824"/>
-            <a:ext cx="9235440" cy="228600"/>
+            <a:ext cx="9692640" cy="228600"/>
           </a:xfrm>
           <a:prstGeom prst="rect">
             <a:avLst/>
@@ -11789,7 +11789,7 @@
         <p:spPr>
           <a:xfrm>
             <a:off x="1078992" y="4599432"/>
-            <a:ext cx="9098280" cy="274320"/>
+            <a:ext cx="9555480" cy="274320"/>
           </a:xfrm>
           <a:prstGeom prst="rect">
             <a:avLst/>
@@ -12018,7 +12018,7 @@
         <p:spPr>
           <a:xfrm>
             <a:off x="731520" y="256032"/>
-            <a:ext cx="10058400" cy="256032"/>
+            <a:ext cx="7436815" cy="256032"/>
           </a:xfrm>
           <a:prstGeom prst="rect">
             <a:avLst/>
@@ -12055,7 +12055,7 @@
         <p:spPr>
           <a:xfrm>
             <a:off x="731520" y="530352"/>
-            <a:ext cx="10058400" cy="457200"/>
+            <a:ext cx="7436815" cy="457200"/>
           </a:xfrm>
           <a:prstGeom prst="rect">
             <a:avLst/>
@@ -12092,7 +12092,7 @@
         <p:spPr>
           <a:xfrm>
             <a:off x="731520" y="1600200"/>
-            <a:ext cx="9601200" cy="1289304"/>
+            <a:ext cx="7436815" cy="1289304"/>
           </a:xfrm>
           <a:prstGeom prst="roundRect">
             <a:avLst>
@@ -12139,7 +12139,7 @@
         <p:spPr>
           <a:xfrm>
             <a:off x="932688" y="1746504"/>
-            <a:ext cx="9235440" cy="228600"/>
+            <a:ext cx="7071055" cy="228600"/>
           </a:xfrm>
           <a:prstGeom prst="rect">
             <a:avLst/>
@@ -12219,7 +12219,7 @@
         <p:spPr>
           <a:xfrm>
             <a:off x="1078992" y="2039112"/>
-            <a:ext cx="9098280" cy="274320"/>
+            <a:ext cx="6933895" cy="274320"/>
           </a:xfrm>
           <a:prstGeom prst="rect">
             <a:avLst/>
@@ -12242,7 +12242,7 @@
                 <a:ea typeface="Sarabun"/>
                 <a:cs typeface="Sarabun"/>
               </a:rPr>
-              <a:t>By the end, the learner can greet, ask a name, give a name, and say where they are from in a compact polite exchange.</a:t>
+              <a:t>By the end, you can greet, ask a name, give a name, and say where they are from in a compact polite exchange.</a:t>
             </a:r>
           </a:p>
         </p:txBody>
@@ -12299,7 +12299,7 @@
         <p:spPr>
           <a:xfrm>
             <a:off x="1078992" y="2350008"/>
-            <a:ext cx="9098280" cy="274320"/>
+            <a:ext cx="6933895" cy="274320"/>
           </a:xfrm>
           <a:prstGeom prst="rect">
             <a:avLst/>

--- a/course/modules/M01/L002/M01-L002-deck.pptx
+++ b/course/modules/M01/L002/M01-L002-deck.pptx
@@ -3213,7 +3213,7 @@
         <p:spPr>
           <a:xfrm>
             <a:off x="731520" y="1600200"/>
-            <a:ext cx="7436815" cy="228600"/>
+            <a:ext cx="7071055" cy="228600"/>
           </a:xfrm>
           <a:prstGeom prst="rect">
             <a:avLst/>
@@ -3250,7 +3250,7 @@
         <p:spPr>
           <a:xfrm>
             <a:off x="731520" y="1993392"/>
-            <a:ext cx="7436815" cy="329184"/>
+            <a:ext cx="7071055" cy="329184"/>
           </a:xfrm>
           <a:prstGeom prst="rect">
             <a:avLst/>
@@ -3287,7 +3287,7 @@
         <p:spPr>
           <a:xfrm>
             <a:off x="731520" y="2542032"/>
-            <a:ext cx="7436815" cy="822960"/>
+            <a:ext cx="7071055" cy="822960"/>
           </a:xfrm>
           <a:prstGeom prst="rect">
             <a:avLst/>
@@ -3474,7 +3474,7 @@
                 <a:ea typeface="Sarabun"/>
                 <a:cs typeface="Sarabun"/>
               </a:rPr>
-              <a:t>Learner can say your name, ask someone's name, and state where you are from.</a:t>
+              <a:t>You can say your name, ask someone's name, and state where you are from.</a:t>
             </a:r>
           </a:p>
         </p:txBody>
@@ -3731,7 +3731,7 @@
         <p:spPr>
           <a:xfrm>
             <a:off x="731520" y="256032"/>
-            <a:ext cx="7436815" cy="256032"/>
+            <a:ext cx="7071055" cy="256032"/>
           </a:xfrm>
           <a:prstGeom prst="rect">
             <a:avLst/>
@@ -3768,7 +3768,7 @@
         <p:spPr>
           <a:xfrm>
             <a:off x="731520" y="530352"/>
-            <a:ext cx="7436815" cy="457200"/>
+            <a:ext cx="7071055" cy="457200"/>
           </a:xfrm>
           <a:prstGeom prst="rect">
             <a:avLst/>
@@ -4448,7 +4448,7 @@
         <p:spPr>
           <a:xfrm>
             <a:off x="731520" y="256032"/>
-            <a:ext cx="7436815" cy="256032"/>
+            <a:ext cx="7071055" cy="256032"/>
           </a:xfrm>
           <a:prstGeom prst="rect">
             <a:avLst/>
@@ -4485,7 +4485,7 @@
         <p:spPr>
           <a:xfrm>
             <a:off x="731520" y="530352"/>
-            <a:ext cx="7436815" cy="457200"/>
+            <a:ext cx="7071055" cy="457200"/>
           </a:xfrm>
           <a:prstGeom prst="rect">
             <a:avLst/>
@@ -4522,7 +4522,7 @@
         <p:spPr>
           <a:xfrm>
             <a:off x="731520" y="1325880"/>
-            <a:ext cx="4090248" cy="1572768"/>
+            <a:ext cx="3889080" cy="1572768"/>
           </a:xfrm>
           <a:prstGeom prst="roundRect">
             <a:avLst>
@@ -4612,7 +4612,7 @@
         <p:spPr>
           <a:xfrm>
             <a:off x="1078992" y="1435608"/>
-            <a:ext cx="3633048" cy="658368"/>
+            <a:ext cx="3431880" cy="658368"/>
           </a:xfrm>
           <a:prstGeom prst="rect">
             <a:avLst/>
@@ -4660,7 +4660,7 @@
         <p:spPr>
           <a:xfrm>
             <a:off x="1078992" y="2203704"/>
-            <a:ext cx="3633048" cy="274320"/>
+            <a:ext cx="3431880" cy="274320"/>
           </a:xfrm>
           <a:prstGeom prst="rect">
             <a:avLst/>
@@ -4697,7 +4697,7 @@
         <p:spPr>
           <a:xfrm>
             <a:off x="731520" y="3081528"/>
-            <a:ext cx="4090248" cy="1572768"/>
+            <a:ext cx="3889080" cy="1572768"/>
           </a:xfrm>
           <a:prstGeom prst="roundRect">
             <a:avLst>
@@ -4787,7 +4787,7 @@
         <p:spPr>
           <a:xfrm>
             <a:off x="1078992" y="3191256"/>
-            <a:ext cx="3633048" cy="658368"/>
+            <a:ext cx="3431880" cy="658368"/>
           </a:xfrm>
           <a:prstGeom prst="rect">
             <a:avLst/>
@@ -4835,7 +4835,7 @@
         <p:spPr>
           <a:xfrm>
             <a:off x="1078992" y="3959352"/>
-            <a:ext cx="3633048" cy="274320"/>
+            <a:ext cx="3431880" cy="274320"/>
           </a:xfrm>
           <a:prstGeom prst="rect">
             <a:avLst/>
@@ -4872,7 +4872,7 @@
         <p:spPr>
           <a:xfrm>
             <a:off x="731520" y="4837176"/>
-            <a:ext cx="4090248" cy="1572768"/>
+            <a:ext cx="3889080" cy="1572768"/>
           </a:xfrm>
           <a:prstGeom prst="roundRect">
             <a:avLst>
@@ -4962,7 +4962,7 @@
         <p:spPr>
           <a:xfrm>
             <a:off x="1078992" y="4946904"/>
-            <a:ext cx="3633048" cy="658368"/>
+            <a:ext cx="3431880" cy="658368"/>
           </a:xfrm>
           <a:prstGeom prst="rect">
             <a:avLst/>
@@ -5010,7 +5010,7 @@
         <p:spPr>
           <a:xfrm>
             <a:off x="1078992" y="5715000"/>
-            <a:ext cx="3633048" cy="274320"/>
+            <a:ext cx="3431880" cy="274320"/>
           </a:xfrm>
           <a:prstGeom prst="rect">
             <a:avLst/>
@@ -5047,7 +5047,7 @@
         <p:spPr>
           <a:xfrm>
             <a:off x="731520" y="6592824"/>
-            <a:ext cx="4090248" cy="1572768"/>
+            <a:ext cx="3889080" cy="1572768"/>
           </a:xfrm>
           <a:prstGeom prst="roundRect">
             <a:avLst>
@@ -5137,7 +5137,7 @@
         <p:spPr>
           <a:xfrm>
             <a:off x="1078992" y="6702552"/>
-            <a:ext cx="3633048" cy="658368"/>
+            <a:ext cx="3431880" cy="658368"/>
           </a:xfrm>
           <a:prstGeom prst="rect">
             <a:avLst/>
@@ -5185,7 +5185,7 @@
         <p:spPr>
           <a:xfrm>
             <a:off x="1078992" y="7470648"/>
-            <a:ext cx="3633048" cy="274320"/>
+            <a:ext cx="3431880" cy="274320"/>
           </a:xfrm>
           <a:prstGeom prst="rect">
             <a:avLst/>
@@ -5870,7 +5870,7 @@
         <p:spPr>
           <a:xfrm>
             <a:off x="731520" y="256032"/>
-            <a:ext cx="7436815" cy="256032"/>
+            <a:ext cx="7071055" cy="256032"/>
           </a:xfrm>
           <a:prstGeom prst="rect">
             <a:avLst/>
@@ -5907,7 +5907,7 @@
         <p:spPr>
           <a:xfrm>
             <a:off x="731520" y="530352"/>
-            <a:ext cx="7436815" cy="457200"/>
+            <a:ext cx="7071055" cy="457200"/>
           </a:xfrm>
           <a:prstGeom prst="rect">
             <a:avLst/>
@@ -5944,7 +5944,7 @@
         <p:spPr>
           <a:xfrm>
             <a:off x="731520" y="1325880"/>
-            <a:ext cx="4090248" cy="1572768"/>
+            <a:ext cx="3889080" cy="1572768"/>
           </a:xfrm>
           <a:prstGeom prst="roundRect">
             <a:avLst>
@@ -6034,7 +6034,7 @@
         <p:spPr>
           <a:xfrm>
             <a:off x="1078992" y="1435608"/>
-            <a:ext cx="3633048" cy="658368"/>
+            <a:ext cx="3431880" cy="658368"/>
           </a:xfrm>
           <a:prstGeom prst="rect">
             <a:avLst/>
@@ -6082,7 +6082,7 @@
         <p:spPr>
           <a:xfrm>
             <a:off x="1078992" y="2203704"/>
-            <a:ext cx="3633048" cy="274320"/>
+            <a:ext cx="3431880" cy="274320"/>
           </a:xfrm>
           <a:prstGeom prst="rect">
             <a:avLst/>
@@ -6119,7 +6119,7 @@
         <p:spPr>
           <a:xfrm>
             <a:off x="731520" y="3081528"/>
-            <a:ext cx="4090248" cy="1572768"/>
+            <a:ext cx="3889080" cy="1572768"/>
           </a:xfrm>
           <a:prstGeom prst="roundRect">
             <a:avLst>
@@ -6209,7 +6209,7 @@
         <p:spPr>
           <a:xfrm>
             <a:off x="1078992" y="3191256"/>
-            <a:ext cx="3633048" cy="658368"/>
+            <a:ext cx="3431880" cy="658368"/>
           </a:xfrm>
           <a:prstGeom prst="rect">
             <a:avLst/>
@@ -6257,7 +6257,7 @@
         <p:spPr>
           <a:xfrm>
             <a:off x="1078992" y="3959352"/>
-            <a:ext cx="3633048" cy="274320"/>
+            <a:ext cx="3431880" cy="274320"/>
           </a:xfrm>
           <a:prstGeom prst="rect">
             <a:avLst/>
@@ -6294,7 +6294,7 @@
         <p:spPr>
           <a:xfrm>
             <a:off x="731520" y="4837176"/>
-            <a:ext cx="4090248" cy="1572768"/>
+            <a:ext cx="3889080" cy="1572768"/>
           </a:xfrm>
           <a:prstGeom prst="roundRect">
             <a:avLst>
@@ -6384,7 +6384,7 @@
         <p:spPr>
           <a:xfrm>
             <a:off x="1078992" y="4946904"/>
-            <a:ext cx="3633048" cy="658368"/>
+            <a:ext cx="3431880" cy="658368"/>
           </a:xfrm>
           <a:prstGeom prst="rect">
             <a:avLst/>
@@ -6432,7 +6432,7 @@
         <p:spPr>
           <a:xfrm>
             <a:off x="1078992" y="5715000"/>
-            <a:ext cx="3633048" cy="274320"/>
+            <a:ext cx="3431880" cy="274320"/>
           </a:xfrm>
           <a:prstGeom prst="rect">
             <a:avLst/>
@@ -6469,7 +6469,7 @@
         <p:spPr>
           <a:xfrm>
             <a:off x="731520" y="6592824"/>
-            <a:ext cx="4090248" cy="1572768"/>
+            <a:ext cx="3889080" cy="1572768"/>
           </a:xfrm>
           <a:prstGeom prst="roundRect">
             <a:avLst>
@@ -6559,7 +6559,7 @@
         <p:spPr>
           <a:xfrm>
             <a:off x="1078992" y="6702552"/>
-            <a:ext cx="3633048" cy="658368"/>
+            <a:ext cx="3431880" cy="658368"/>
           </a:xfrm>
           <a:prstGeom prst="rect">
             <a:avLst/>
@@ -6607,7 +6607,7 @@
         <p:spPr>
           <a:xfrm>
             <a:off x="1078992" y="7470648"/>
-            <a:ext cx="3633048" cy="274320"/>
+            <a:ext cx="3431880" cy="274320"/>
           </a:xfrm>
           <a:prstGeom prst="rect">
             <a:avLst/>
@@ -7380,7 +7380,7 @@
         <p:spPr>
           <a:xfrm>
             <a:off x="731520" y="256032"/>
-            <a:ext cx="7436815" cy="256032"/>
+            <a:ext cx="7071055" cy="256032"/>
           </a:xfrm>
           <a:prstGeom prst="rect">
             <a:avLst/>
@@ -7417,7 +7417,7 @@
         <p:spPr>
           <a:xfrm>
             <a:off x="731520" y="530352"/>
-            <a:ext cx="7436815" cy="457200"/>
+            <a:ext cx="7071055" cy="457200"/>
           </a:xfrm>
           <a:prstGeom prst="rect">
             <a:avLst/>
@@ -7454,7 +7454,7 @@
         <p:spPr>
           <a:xfrm>
             <a:off x="731520" y="1325880"/>
-            <a:ext cx="4090248" cy="1572768"/>
+            <a:ext cx="3889080" cy="1572768"/>
           </a:xfrm>
           <a:prstGeom prst="roundRect">
             <a:avLst>
@@ -7544,7 +7544,7 @@
         <p:spPr>
           <a:xfrm>
             <a:off x="1078992" y="1435608"/>
-            <a:ext cx="3633048" cy="658368"/>
+            <a:ext cx="3431880" cy="658368"/>
           </a:xfrm>
           <a:prstGeom prst="rect">
             <a:avLst/>
@@ -7592,7 +7592,7 @@
         <p:spPr>
           <a:xfrm>
             <a:off x="1078992" y="2203704"/>
-            <a:ext cx="3633048" cy="274320"/>
+            <a:ext cx="3431880" cy="274320"/>
           </a:xfrm>
           <a:prstGeom prst="rect">
             <a:avLst/>
@@ -7629,7 +7629,7 @@
         <p:spPr>
           <a:xfrm>
             <a:off x="731520" y="3081528"/>
-            <a:ext cx="4090248" cy="1572768"/>
+            <a:ext cx="3889080" cy="1572768"/>
           </a:xfrm>
           <a:prstGeom prst="roundRect">
             <a:avLst>
@@ -7719,7 +7719,7 @@
         <p:spPr>
           <a:xfrm>
             <a:off x="1078992" y="3191256"/>
-            <a:ext cx="3633048" cy="658368"/>
+            <a:ext cx="3431880" cy="658368"/>
           </a:xfrm>
           <a:prstGeom prst="rect">
             <a:avLst/>
@@ -7767,7 +7767,7 @@
         <p:spPr>
           <a:xfrm>
             <a:off x="1078992" y="3959352"/>
-            <a:ext cx="3633048" cy="274320"/>
+            <a:ext cx="3431880" cy="274320"/>
           </a:xfrm>
           <a:prstGeom prst="rect">
             <a:avLst/>
@@ -7804,7 +7804,7 @@
         <p:spPr>
           <a:xfrm>
             <a:off x="731520" y="4837176"/>
-            <a:ext cx="4090248" cy="1572768"/>
+            <a:ext cx="3889080" cy="1572768"/>
           </a:xfrm>
           <a:prstGeom prst="roundRect">
             <a:avLst>
@@ -7894,7 +7894,7 @@
         <p:spPr>
           <a:xfrm>
             <a:off x="1078992" y="4946904"/>
-            <a:ext cx="3633048" cy="658368"/>
+            <a:ext cx="3431880" cy="658368"/>
           </a:xfrm>
           <a:prstGeom prst="rect">
             <a:avLst/>
@@ -7942,7 +7942,7 @@
         <p:spPr>
           <a:xfrm>
             <a:off x="1078992" y="5715000"/>
-            <a:ext cx="3633048" cy="274320"/>
+            <a:ext cx="3431880" cy="274320"/>
           </a:xfrm>
           <a:prstGeom prst="rect">
             <a:avLst/>
@@ -8759,7 +8759,7 @@
         <p:spPr>
           <a:xfrm>
             <a:off x="731520" y="256032"/>
-            <a:ext cx="7436815" cy="256032"/>
+            <a:ext cx="7071055" cy="256032"/>
           </a:xfrm>
           <a:prstGeom prst="rect">
             <a:avLst/>
@@ -8796,7 +8796,7 @@
         <p:spPr>
           <a:xfrm>
             <a:off x="731520" y="530352"/>
-            <a:ext cx="7436815" cy="457200"/>
+            <a:ext cx="7071055" cy="457200"/>
           </a:xfrm>
           <a:prstGeom prst="rect">
             <a:avLst/>
@@ -8866,7 +8866,7 @@
         <p:spPr>
           <a:xfrm>
             <a:off x="731520" y="1325880"/>
-            <a:ext cx="4090248" cy="1572768"/>
+            <a:ext cx="3889080" cy="1572768"/>
           </a:xfrm>
           <a:prstGeom prst="roundRect">
             <a:avLst>
@@ -8956,7 +8956,7 @@
         <p:spPr>
           <a:xfrm>
             <a:off x="1078992" y="1435608"/>
-            <a:ext cx="3633048" cy="658368"/>
+            <a:ext cx="3431880" cy="658368"/>
           </a:xfrm>
           <a:prstGeom prst="rect">
             <a:avLst/>
@@ -9004,7 +9004,7 @@
         <p:spPr>
           <a:xfrm>
             <a:off x="1078992" y="2203704"/>
-            <a:ext cx="3633048" cy="274320"/>
+            <a:ext cx="3431880" cy="274320"/>
           </a:xfrm>
           <a:prstGeom prst="rect">
             <a:avLst/>
@@ -9041,7 +9041,7 @@
         <p:spPr>
           <a:xfrm>
             <a:off x="731520" y="3081528"/>
-            <a:ext cx="4090248" cy="1572768"/>
+            <a:ext cx="3889080" cy="1572768"/>
           </a:xfrm>
           <a:prstGeom prst="roundRect">
             <a:avLst>
@@ -9131,7 +9131,7 @@
         <p:spPr>
           <a:xfrm>
             <a:off x="1078992" y="3191256"/>
-            <a:ext cx="3633048" cy="658368"/>
+            <a:ext cx="3431880" cy="658368"/>
           </a:xfrm>
           <a:prstGeom prst="rect">
             <a:avLst/>
@@ -9179,7 +9179,7 @@
         <p:spPr>
           <a:xfrm>
             <a:off x="1078992" y="3959352"/>
-            <a:ext cx="3633048" cy="274320"/>
+            <a:ext cx="3431880" cy="274320"/>
           </a:xfrm>
           <a:prstGeom prst="rect">
             <a:avLst/>
@@ -9216,7 +9216,7 @@
         <p:spPr>
           <a:xfrm>
             <a:off x="731520" y="4837176"/>
-            <a:ext cx="4090248" cy="1572768"/>
+            <a:ext cx="3889080" cy="1572768"/>
           </a:xfrm>
           <a:prstGeom prst="roundRect">
             <a:avLst>
@@ -9306,7 +9306,7 @@
         <p:spPr>
           <a:xfrm>
             <a:off x="1078992" y="4946904"/>
-            <a:ext cx="3633048" cy="658368"/>
+            <a:ext cx="3431880" cy="658368"/>
           </a:xfrm>
           <a:prstGeom prst="rect">
             <a:avLst/>
@@ -9354,7 +9354,7 @@
         <p:spPr>
           <a:xfrm>
             <a:off x="1078992" y="5715000"/>
-            <a:ext cx="3633048" cy="274320"/>
+            <a:ext cx="3431880" cy="274320"/>
           </a:xfrm>
           <a:prstGeom prst="rect">
             <a:avLst/>
@@ -9827,7 +9827,7 @@
         <p:spPr>
           <a:xfrm>
             <a:off x="731520" y="256032"/>
-            <a:ext cx="7436815" cy="256032"/>
+            <a:ext cx="7071055" cy="256032"/>
           </a:xfrm>
           <a:prstGeom prst="rect">
             <a:avLst/>
@@ -9864,7 +9864,7 @@
         <p:spPr>
           <a:xfrm>
             <a:off x="731520" y="530352"/>
-            <a:ext cx="7436815" cy="457200"/>
+            <a:ext cx="7071055" cy="457200"/>
           </a:xfrm>
           <a:prstGeom prst="rect">
             <a:avLst/>
@@ -9957,7 +9957,7 @@
         <p:spPr>
           <a:xfrm>
             <a:off x="1965960" y="1069848"/>
-            <a:ext cx="6202375" cy="384048"/>
+            <a:ext cx="5836615" cy="384048"/>
           </a:xfrm>
           <a:prstGeom prst="rect">
             <a:avLst/>
@@ -10005,7 +10005,7 @@
         <p:spPr>
           <a:xfrm>
             <a:off x="1965960" y="1353312"/>
-            <a:ext cx="6202375" cy="228600"/>
+            <a:ext cx="5836615" cy="228600"/>
           </a:xfrm>
           <a:prstGeom prst="rect">
             <a:avLst/>
@@ -10098,7 +10098,7 @@
         <p:spPr>
           <a:xfrm>
             <a:off x="1965960" y="1847088"/>
-            <a:ext cx="6202375" cy="384048"/>
+            <a:ext cx="5836615" cy="384048"/>
           </a:xfrm>
           <a:prstGeom prst="rect">
             <a:avLst/>
@@ -10146,7 +10146,7 @@
         <p:spPr>
           <a:xfrm>
             <a:off x="1965960" y="2130552"/>
-            <a:ext cx="6202375" cy="228600"/>
+            <a:ext cx="5836615" cy="228600"/>
           </a:xfrm>
           <a:prstGeom prst="rect">
             <a:avLst/>
@@ -10239,7 +10239,7 @@
         <p:spPr>
           <a:xfrm>
             <a:off x="1965960" y="2624328"/>
-            <a:ext cx="6202375" cy="384048"/>
+            <a:ext cx="5836615" cy="384048"/>
           </a:xfrm>
           <a:prstGeom prst="rect">
             <a:avLst/>
@@ -10287,7 +10287,7 @@
         <p:spPr>
           <a:xfrm>
             <a:off x="1965960" y="2907792"/>
-            <a:ext cx="6202375" cy="228600"/>
+            <a:ext cx="5836615" cy="228600"/>
           </a:xfrm>
           <a:prstGeom prst="rect">
             <a:avLst/>
@@ -10873,7 +10873,7 @@
         <p:spPr>
           <a:xfrm>
             <a:off x="731520" y="256032"/>
-            <a:ext cx="7436815" cy="256032"/>
+            <a:ext cx="7071055" cy="256032"/>
           </a:xfrm>
           <a:prstGeom prst="rect">
             <a:avLst/>
@@ -10910,7 +10910,7 @@
         <p:spPr>
           <a:xfrm>
             <a:off x="731520" y="530352"/>
-            <a:ext cx="7436815" cy="457200"/>
+            <a:ext cx="7071055" cy="457200"/>
           </a:xfrm>
           <a:prstGeom prst="rect">
             <a:avLst/>
@@ -10947,7 +10947,7 @@
         <p:spPr>
           <a:xfrm>
             <a:off x="731520" y="1417320"/>
-            <a:ext cx="7436815" cy="2331720"/>
+            <a:ext cx="7071055" cy="2331720"/>
           </a:xfrm>
           <a:prstGeom prst="roundRect">
             <a:avLst>
@@ -10994,7 +10994,7 @@
         <p:spPr>
           <a:xfrm>
             <a:off x="932688" y="1563624"/>
-            <a:ext cx="7071055" cy="228600"/>
+            <a:ext cx="6705295" cy="228600"/>
           </a:xfrm>
           <a:prstGeom prst="rect">
             <a:avLst/>
@@ -11074,7 +11074,7 @@
         <p:spPr>
           <a:xfrm>
             <a:off x="1078992" y="1856232"/>
-            <a:ext cx="6933895" cy="274320"/>
+            <a:ext cx="6568135" cy="274320"/>
           </a:xfrm>
           <a:prstGeom prst="rect">
             <a:avLst/>
@@ -11187,7 +11187,7 @@
         <p:spPr>
           <a:xfrm>
             <a:off x="1078992" y="2167128"/>
-            <a:ext cx="6933895" cy="274320"/>
+            <a:ext cx="6568135" cy="274320"/>
           </a:xfrm>
           <a:prstGeom prst="rect">
             <a:avLst/>
@@ -11300,7 +11300,7 @@
         <p:spPr>
           <a:xfrm>
             <a:off x="1078992" y="2478024"/>
-            <a:ext cx="6933895" cy="274320"/>
+            <a:ext cx="6568135" cy="274320"/>
           </a:xfrm>
           <a:prstGeom prst="rect">
             <a:avLst/>
@@ -11446,7 +11446,7 @@
         <p:spPr>
           <a:xfrm>
             <a:off x="1078992" y="2788920"/>
-            <a:ext cx="6933895" cy="274320"/>
+            <a:ext cx="6568135" cy="274320"/>
           </a:xfrm>
           <a:prstGeom prst="rect">
             <a:avLst/>
@@ -11559,7 +11559,7 @@
         <p:spPr>
           <a:xfrm>
             <a:off x="1078992" y="3099816"/>
-            <a:ext cx="6933895" cy="274320"/>
+            <a:ext cx="6568135" cy="274320"/>
           </a:xfrm>
           <a:prstGeom prst="rect">
             <a:avLst/>
@@ -12018,7 +12018,7 @@
         <p:spPr>
           <a:xfrm>
             <a:off x="731520" y="256032"/>
-            <a:ext cx="7436815" cy="256032"/>
+            <a:ext cx="7071055" cy="256032"/>
           </a:xfrm>
           <a:prstGeom prst="rect">
             <a:avLst/>
@@ -12055,7 +12055,7 @@
         <p:spPr>
           <a:xfrm>
             <a:off x="731520" y="530352"/>
-            <a:ext cx="7436815" cy="457200"/>
+            <a:ext cx="7071055" cy="457200"/>
           </a:xfrm>
           <a:prstGeom prst="rect">
             <a:avLst/>
@@ -12092,7 +12092,7 @@
         <p:spPr>
           <a:xfrm>
             <a:off x="731520" y="1600200"/>
-            <a:ext cx="7436815" cy="1289304"/>
+            <a:ext cx="7071055" cy="1289304"/>
           </a:xfrm>
           <a:prstGeom prst="roundRect">
             <a:avLst>
@@ -12139,7 +12139,7 @@
         <p:spPr>
           <a:xfrm>
             <a:off x="932688" y="1746504"/>
-            <a:ext cx="7071055" cy="228600"/>
+            <a:ext cx="6705295" cy="228600"/>
           </a:xfrm>
           <a:prstGeom prst="rect">
             <a:avLst/>
@@ -12219,7 +12219,7 @@
         <p:spPr>
           <a:xfrm>
             <a:off x="1078992" y="2039112"/>
-            <a:ext cx="6933895" cy="274320"/>
+            <a:ext cx="6568135" cy="274320"/>
           </a:xfrm>
           <a:prstGeom prst="rect">
             <a:avLst/>
@@ -12299,7 +12299,7 @@
         <p:spPr>
           <a:xfrm>
             <a:off x="1078992" y="2350008"/>
-            <a:ext cx="6933895" cy="274320"/>
+            <a:ext cx="6568135" cy="274320"/>
           </a:xfrm>
           <a:prstGeom prst="rect">
             <a:avLst/>

--- a/course/modules/M01/L002/M01-L002-deck.pptx
+++ b/course/modules/M01/L002/M01-L002-deck.pptx
@@ -3287,7 +3287,7 @@
         <p:spPr>
           <a:xfrm>
             <a:off x="731520" y="2542032"/>
-            <a:ext cx="7071055" cy="822960"/>
+            <a:ext cx="7071055" cy="1097280"/>
           </a:xfrm>
           <a:prstGeom prst="rect">
             <a:avLst/>
@@ -3302,7 +3302,7 @@
           <a:p>
             <a:pPr algn="l"/>
             <a:r>
-              <a:rPr sz="4200" b="1" i="0" lang="en-US" altLang="en-US">
+              <a:rPr sz="3200" b="1" i="0" lang="en-US" altLang="en-US">
                 <a:solidFill>
                   <a:srgbClr val="24333D"/>
                 </a:solidFill>
@@ -3323,8 +3323,8 @@
         </p:nvSpPr>
         <p:spPr>
           <a:xfrm>
-            <a:off x="731520" y="3977639"/>
-            <a:ext cx="5303520" cy="1289304"/>
+            <a:off x="731520" y="4114800"/>
+            <a:ext cx="7071055" cy="1289304"/>
           </a:xfrm>
           <a:prstGeom prst="roundRect">
             <a:avLst>
@@ -3370,8 +3370,8 @@
         </p:nvSpPr>
         <p:spPr>
           <a:xfrm>
-            <a:off x="932688" y="4123943"/>
-            <a:ext cx="4937760" cy="228600"/>
+            <a:off x="932688" y="4261104"/>
+            <a:ext cx="6705295" cy="228600"/>
           </a:xfrm>
           <a:prstGeom prst="rect">
             <a:avLst/>
@@ -3407,7 +3407,7 @@
         </p:nvSpPr>
         <p:spPr>
           <a:xfrm>
-            <a:off x="932688" y="4507991"/>
+            <a:off x="932688" y="4645152"/>
             <a:ext cx="82296" cy="82296"/>
           </a:xfrm>
           <a:prstGeom prst="ellipse">
@@ -3450,8 +3450,8 @@
         </p:nvSpPr>
         <p:spPr>
           <a:xfrm>
-            <a:off x="1078992" y="4416551"/>
-            <a:ext cx="4800600" cy="274320"/>
+            <a:off x="1078992" y="4553712"/>
+            <a:ext cx="6568135" cy="274320"/>
           </a:xfrm>
           <a:prstGeom prst="rect">
             <a:avLst/>
@@ -3487,7 +3487,7 @@
         </p:nvSpPr>
         <p:spPr>
           <a:xfrm>
-            <a:off x="932688" y="4818887"/>
+            <a:off x="932688" y="4956048"/>
             <a:ext cx="82296" cy="82296"/>
           </a:xfrm>
           <a:prstGeom prst="ellipse">
@@ -3530,8 +3530,8 @@
         </p:nvSpPr>
         <p:spPr>
           <a:xfrm>
-            <a:off x="1078992" y="4727447"/>
-            <a:ext cx="4800600" cy="274320"/>
+            <a:off x="1078992" y="4864608"/>
+            <a:ext cx="6568135" cy="274320"/>
           </a:xfrm>
           <a:prstGeom prst="rect">
             <a:avLst/>

--- a/course/modules/M01/L002/M01-L002-deck.pptx
+++ b/course/modules/M01/L002/M01-L002-deck.pptx
@@ -3768,7 +3768,7 @@
         <p:spPr>
           <a:xfrm>
             <a:off x="731520" y="530352"/>
-            <a:ext cx="7071055" cy="457200"/>
+            <a:ext cx="7071055" cy="640080"/>
           </a:xfrm>
           <a:prstGeom prst="rect">
             <a:avLst/>
@@ -3912,7 +3912,7 @@
                 <a:ea typeface="Sarabun"/>
                 <a:cs typeface="Sarabun"/>
               </a:rPr>
-              <a:t>Learner can say your name, ask someone's name, and state where you are from.</a:t>
+              <a:t>You can say your name, ask someone's name, and state where you are from.</a:t>
             </a:r>
           </a:p>
         </p:txBody>
@@ -4033,7 +4033,7 @@
                 <a:ea typeface="Sarabun"/>
                 <a:cs typeface="Sarabun"/>
               </a:rPr>
-              <a:t>Learner can recycle recent vocabulary while using origin pattern with </a:t>
+              <a:t>You can recycle recent vocabulary while using origin pattern with </a:t>
             </a:r>
             <a:r>
               <a:rPr sz="1500" b="0" i="0" lang="th-TH" altLang="en-US">
@@ -4485,7 +4485,7 @@
         <p:spPr>
           <a:xfrm>
             <a:off x="731520" y="530352"/>
-            <a:ext cx="7071055" cy="457200"/>
+            <a:ext cx="7071055" cy="640080"/>
           </a:xfrm>
           <a:prstGeom prst="rect">
             <a:avLst/>
@@ -5907,7 +5907,7 @@
         <p:spPr>
           <a:xfrm>
             <a:off x="731520" y="530352"/>
-            <a:ext cx="7071055" cy="457200"/>
+            <a:ext cx="7071055" cy="640080"/>
           </a:xfrm>
           <a:prstGeom prst="rect">
             <a:avLst/>
@@ -7417,7 +7417,7 @@
         <p:spPr>
           <a:xfrm>
             <a:off x="731520" y="530352"/>
-            <a:ext cx="7071055" cy="457200"/>
+            <a:ext cx="7071055" cy="640080"/>
           </a:xfrm>
           <a:prstGeom prst="rect">
             <a:avLst/>
@@ -7432,7 +7432,7 @@
           <a:p>
             <a:pPr algn="l"/>
             <a:r>
-              <a:rPr sz="3600" b="1" i="0" lang="en-US" altLang="en-US">
+              <a:rPr sz="2800" b="1" i="0" lang="en-US" altLang="en-US">
                 <a:solidFill>
                   <a:srgbClr val="24333D"/>
                 </a:solidFill>
@@ -8796,7 +8796,7 @@
         <p:spPr>
           <a:xfrm>
             <a:off x="731520" y="530352"/>
-            <a:ext cx="7071055" cy="457200"/>
+            <a:ext cx="7071055" cy="640080"/>
           </a:xfrm>
           <a:prstGeom prst="rect">
             <a:avLst/>
@@ -8811,7 +8811,7 @@
           <a:p>
             <a:pPr algn="l"/>
             <a:r>
-              <a:rPr sz="3600" b="1" i="0" lang="en-US" altLang="en-US">
+              <a:rPr sz="2800" b="1" i="0" lang="en-US" altLang="en-US">
                 <a:solidFill>
                   <a:srgbClr val="24333D"/>
                 </a:solidFill>
@@ -8822,7 +8822,7 @@
               <a:t>Pronunciation: the falling tone on </a:t>
             </a:r>
             <a:r>
-              <a:rPr sz="3600" b="1" i="0" lang="th-TH" altLang="en-US">
+              <a:rPr sz="2800" b="1" i="0" lang="th-TH" altLang="en-US">
                 <a:solidFill>
                   <a:srgbClr val="24333D"/>
                 </a:solidFill>
@@ -8833,7 +8833,7 @@
               <a:t>ชื่อ</a:t>
             </a:r>
             <a:r>
-              <a:rPr sz="2230" b="0" i="1" lang="en-US" altLang="en-US">
+              <a:rPr sz="1739" b="0" i="1" lang="en-US" altLang="en-US">
                 <a:solidFill>
                   <a:srgbClr val="566873"/>
                 </a:solidFill>
@@ -8844,7 +8844,7 @@
               <a:t> (chûue)</a:t>
             </a:r>
             <a:r>
-              <a:rPr sz="3600" b="1" i="0" lang="th-TH" altLang="en-US">
+              <a:rPr sz="2800" b="1" i="0" lang="th-TH" altLang="en-US">
                 <a:solidFill>
                   <a:srgbClr val="24333D"/>
                 </a:solidFill>
@@ -9864,7 +9864,7 @@
         <p:spPr>
           <a:xfrm>
             <a:off x="731520" y="530352"/>
-            <a:ext cx="7071055" cy="457200"/>
+            <a:ext cx="7071055" cy="640080"/>
           </a:xfrm>
           <a:prstGeom prst="rect">
             <a:avLst/>
@@ -10910,7 +10910,7 @@
         <p:spPr>
           <a:xfrm>
             <a:off x="731520" y="530352"/>
-            <a:ext cx="7071055" cy="457200"/>
+            <a:ext cx="7071055" cy="640080"/>
           </a:xfrm>
           <a:prstGeom prst="rect">
             <a:avLst/>
@@ -12055,7 +12055,7 @@
         <p:spPr>
           <a:xfrm>
             <a:off x="731520" y="530352"/>
-            <a:ext cx="7071055" cy="457200"/>
+            <a:ext cx="7071055" cy="640080"/>
           </a:xfrm>
           <a:prstGeom prst="rect">
             <a:avLst/>
